--- a/sayt/media/resources/2026/10/mehnat-muhofazasi-10-mavzu.pptx
+++ b/sayt/media/resources/2026/10/mehnat-muhofazasi-10-mavzu.pptx
@@ -16284,7 +16284,7 @@
                 </a:solidFill>
                 <a:latin typeface="Georgia"/>
               </a:rPr>
-              <a:t>Yurak-o‘pka reanimatsiyasi (yo‘r): ko‘krak qafasini bosish</a:t>
+              <a:t>Yurak-o‘pka reanimatsiyasi (YO‘R): ko‘krak qafasini bosish</a:t>
             </a:r>
             <a:br/>
             <a:r>
